--- a/docs/quickguides/pkw/pptx/11_Quick_Guide_oneSCM_Rechnung_Zahlung_Kosten_und_Auswertungen_Pkw.pptx
+++ b/docs/quickguides/pkw/pptx/11_Quick_Guide_oneSCM_Rechnung_Zahlung_Kosten_und_Auswertungen_Pkw.pptx
@@ -1503,7 +1503,7 @@
                 <a:ea typeface="MB Corpo S Text Office" pitchFamily="34" charset="-122"/>
                 <a:cs typeface="MB Corpo S Text Office" pitchFamily="34" charset="-120"/>
               </a:rPr>
-              <a:t>Dieses Dokument ist interaktiv – Verweise auf Handbuchkapitel und Systeme sind als Links hinterlegt.</a:t>
+              <a:t>Verweise auf Handbuchkapitel und Systeme sind hervorgehoben; E-Mail-Adressen sind als Links hinterlegt.</a:t>
             </a:r>
             <a:endParaRPr lang="en-US" sz="900" dirty="0"/>
           </a:p>
@@ -3207,11 +3207,11 @@
         <p:spPr>
           <a:xfrm>
             <a:off x="201168" y="4242816"/>
-            <a:ext cx="4663440" cy="1170432"/>
+            <a:ext cx="4663440" cy="1316736"/>
           </a:xfrm>
           <a:prstGeom prst="roundRect">
             <a:avLst>
-              <a:gd name="adj" fmla="val 7813"/>
+              <a:gd name="adj" fmla="val 6944"/>
             </a:avLst>
           </a:prstGeom>
           <a:solidFill>
@@ -3275,7 +3275,7 @@
         <p:spPr>
           <a:xfrm>
             <a:off x="310896" y="4590288"/>
-            <a:ext cx="4480560" cy="768096"/>
+            <a:ext cx="4480560" cy="914400"/>
           </a:xfrm>
           <a:prstGeom prst="rect">
             <a:avLst/>
@@ -3324,7 +3324,7 @@
                 <a:ea typeface="MB Corpo S Text Office" pitchFamily="34" charset="-122"/>
                 <a:cs typeface="MB Corpo S Text Office" pitchFamily="34" charset="-120"/>
               </a:rPr>
-              <a:t>Exporte enthalten personenbezogene Daten; beachten Sie Kapitel 16.1.</a:t>
+              <a:t>Mit der Annahme einer Werkstattrechnung übernimmt das System den Kilometerstand in die Historie des Vertrags (10.9, 11.5).</a:t>
             </a:r>
             <a:endParaRPr lang="en-US" sz="900" dirty="0"/>
           </a:p>
